--- a/docs/aicomp/法前哨-答辩PPT.pptx
+++ b/docs/aicomp/法前哨-答辩PPT.pptx
@@ -20,6 +20,7 @@
     <p:sldId id="268" r:id="rId20"/>
     <p:sldId id="269" r:id="rId21"/>
     <p:sldId id="270" r:id="rId22"/>
+    <p:sldId id="271" r:id="rId23"/>
   </p:sldIdLst>
   <p:sldSz cx="12191695" cy="6858000" type="screen4x3"/>
   <p:notesSz cx="6858000" cy="9144000"/>
@@ -892,6 +893,76 @@
 </file>
 
 <file path=ppt/notesSlides/notesSlide15.xml><?xml version="1.0" encoding="utf-8"?>
+<p:notes xmlns:a="http://schemas.openxmlformats.org/drawingml/2006/main" xmlns:p="http://schemas.openxmlformats.org/presentationml/2006/main" xmlns:r="http://schemas.openxmlformats.org/officeDocument/2006/relationships">
+  <p:cSld>
+    <p:spTree>
+      <p:nvGrpSpPr>
+        <p:cNvPr id="1" name=""/>
+        <p:cNvGrpSpPr/>
+        <p:nvPr/>
+      </p:nvGrpSpPr>
+      <p:grpSpPr>
+        <a:xfrm>
+          <a:off x="0" y="0"/>
+          <a:ext cx="0" cy="0"/>
+          <a:chOff x="0" y="0"/>
+          <a:chExt cx="0" cy="0"/>
+        </a:xfrm>
+      </p:grpSpPr>
+      <p:sp>
+        <p:nvSpPr>
+          <p:cNvPr id="2" name="Slide Image Placeholder 1"/>
+          <p:cNvSpPr>
+            <a:spLocks noGrp="1"/>
+          </p:cNvSpPr>
+          <p:nvPr>
+            <p:ph type="sldImg" idx="2"/>
+          </p:nvPr>
+        </p:nvSpPr>
+        <p:spPr/>
+      </p:sp>
+      <p:sp>
+        <p:nvSpPr>
+          <p:cNvPr id="3" name="Notes Placeholder 2"/>
+          <p:cNvSpPr>
+            <a:spLocks noGrp="1"/>
+          </p:cNvSpPr>
+          <p:nvPr>
+            <p:ph type="body" idx="3" sz="quarter"/>
+          </p:nvPr>
+        </p:nvSpPr>
+        <p:spPr/>
+        <p:txBody>
+          <a:bodyPr/>
+          <a:lstStyle/>
+          <a:p>
+            <a:r>
+              <a:t>备用页，只在评委问产品形态时讲：手机 PWA 优先，对方手牌是隐藏信息，只有打出的牌才核验；桌面退到深读/导出。</a:t>
+            </a:r>
+          </a:p>
+        </p:txBody>
+      </p:sp>
+      <p:sp>
+        <p:nvSpPr>
+          <p:cNvPr id="4" name="Slide Number Placeholder 3"/>
+          <p:cNvSpPr>
+            <a:spLocks noGrp="1"/>
+          </p:cNvSpPr>
+          <p:nvPr>
+            <p:ph type="sldNum" idx="5" sz="quarter"/>
+          </p:nvPr>
+        </p:nvSpPr>
+        <p:spPr/>
+      </p:sp>
+    </p:spTree>
+  </p:cSld>
+  <p:clrMapOvr>
+    <a:masterClrMapping/>
+  </p:clrMapOvr>
+</p:notes>
+</file>
+
+<file path=ppt/notesSlides/notesSlide16.xml><?xml version="1.0" encoding="utf-8"?>
 <p:notes xmlns:a="http://schemas.openxmlformats.org/drawingml/2006/main" xmlns:p="http://schemas.openxmlformats.org/presentationml/2006/main" xmlns:r="http://schemas.openxmlformats.org/officeDocument/2006/relationships">
   <p:cSld>
     <p:spTree>
@@ -7111,7 +7182,7 @@
                 <a:latin typeface="微软雅黑"/>
                 <a:ea typeface="微软雅黑"/>
               </a:rPr>
-              <a:t>10 / 15</a:t>
+              <a:t>10 / 16</a:t>
             </a:r>
           </a:p>
         </p:txBody>
@@ -8102,7 +8173,7 @@
                 <a:latin typeface="微软雅黑"/>
                 <a:ea typeface="微软雅黑"/>
               </a:rPr>
-              <a:t>11 / 15</a:t>
+              <a:t>11 / 16</a:t>
             </a:r>
           </a:p>
         </p:txBody>
@@ -8754,7 +8825,7 @@
                 <a:latin typeface="微软雅黑"/>
                 <a:ea typeface="微软雅黑"/>
               </a:rPr>
-              <a:t>12 / 15</a:t>
+              <a:t>12 / 16</a:t>
             </a:r>
           </a:p>
         </p:txBody>
@@ -10114,7 +10185,7 @@
                 <a:latin typeface="微软雅黑"/>
                 <a:ea typeface="微软雅黑"/>
               </a:rPr>
-              <a:t>13 / 15</a:t>
+              <a:t>13 / 16</a:t>
             </a:r>
           </a:p>
         </p:txBody>
@@ -11228,7 +11299,7 @@
                 <a:latin typeface="微软雅黑"/>
                 <a:ea typeface="微软雅黑"/>
               </a:rPr>
-              <a:t>14 / 15</a:t>
+              <a:t>14 / 16</a:t>
             </a:r>
           </a:p>
         </p:txBody>
@@ -11261,6 +11332,660 @@
       <p:grpSpPr/>
       <p:sp>
         <p:nvSpPr>
+          <p:cNvPr id="2" name="TextBox 1"/>
+          <p:cNvSpPr txBox="1"/>
+          <p:nvPr/>
+        </p:nvSpPr>
+        <p:spPr>
+          <a:xfrm>
+            <a:off x="548640" y="256032"/>
+            <a:ext cx="8229600" cy="256032"/>
+          </a:xfrm>
+          <a:prstGeom prst="rect">
+            <a:avLst/>
+          </a:prstGeom>
+          <a:noFill/>
+        </p:spPr>
+        <p:txBody>
+          <a:bodyPr wrap="square" lIns="0" rIns="0" tIns="0" bIns="0" anchor="t">
+            <a:spAutoFit/>
+          </a:bodyPr>
+          <a:lstStyle/>
+          <a:p>
+            <a:pPr algn="l">
+              <a:lnSpc>
+                <a:spcPct val="100000"/>
+              </a:lnSpc>
+            </a:pPr>
+            <a:r>
+              <a:rPr sz="1000" b="1">
+                <a:solidFill>
+                  <a:srgbClr val="2A9D8F"/>
+                </a:solidFill>
+                <a:latin typeface="微软雅黑"/>
+                <a:ea typeface="微软雅黑"/>
+              </a:rPr>
+              <a:t>Q&amp;A 备用 · 产品化</a:t>
+            </a:r>
+          </a:p>
+        </p:txBody>
+      </p:sp>
+      <p:sp>
+        <p:nvSpPr>
+          <p:cNvPr id="3" name="TextBox 2"/>
+          <p:cNvSpPr txBox="1"/>
+          <p:nvPr/>
+        </p:nvSpPr>
+        <p:spPr>
+          <a:xfrm>
+            <a:off x="548640" y="502920"/>
+            <a:ext cx="11064240" cy="594360"/>
+          </a:xfrm>
+          <a:prstGeom prst="rect">
+            <a:avLst/>
+          </a:prstGeom>
+          <a:noFill/>
+        </p:spPr>
+        <p:txBody>
+          <a:bodyPr wrap="square" lIns="0" rIns="0" tIns="0" bIns="0" anchor="t">
+            <a:spAutoFit/>
+          </a:bodyPr>
+          <a:lstStyle/>
+          <a:p>
+            <a:pPr algn="l">
+              <a:lnSpc>
+                <a:spcPct val="100000"/>
+              </a:lnSpc>
+            </a:pPr>
+            <a:r>
+              <a:rPr sz="2500" b="1">
+                <a:solidFill>
+                  <a:srgbClr val="123B5D"/>
+                </a:solidFill>
+                <a:latin typeface="微软雅黑"/>
+                <a:ea typeface="微软雅黑"/>
+              </a:rPr>
+              <a:t>手机端：把他“有什么”藏起来</a:t>
+            </a:r>
+          </a:p>
+        </p:txBody>
+      </p:sp>
+      <p:sp>
+        <p:nvSpPr>
+          <p:cNvPr id="4" name="Rectangle 3"/>
+          <p:cNvSpPr/>
+          <p:nvPr/>
+        </p:nvSpPr>
+        <p:spPr>
+          <a:xfrm>
+            <a:off x="548640" y="1078992"/>
+            <a:ext cx="11091672" cy="10972"/>
+          </a:xfrm>
+          <a:prstGeom prst="rect">
+            <a:avLst/>
+          </a:prstGeom>
+          <a:solidFill>
+            <a:srgbClr val="D4E0EA"/>
+          </a:solidFill>
+          <a:ln>
+            <a:noFill/>
+          </a:ln>
+          <a:effectLst/>
+        </p:spPr>
+        <p:style>
+          <a:lnRef idx="1">
+            <a:schemeClr val="accent1"/>
+          </a:lnRef>
+          <a:fillRef idx="3">
+            <a:schemeClr val="accent1"/>
+          </a:fillRef>
+          <a:effectRef idx="2">
+            <a:schemeClr val="accent1"/>
+          </a:effectRef>
+          <a:fontRef idx="minor">
+            <a:schemeClr val="lt1"/>
+          </a:fontRef>
+        </p:style>
+        <p:txBody>
+          <a:bodyPr rtlCol="0" anchor="ctr"/>
+          <a:lstStyle/>
+          <a:p>
+            <a:pPr algn="ctr"/>
+          </a:p>
+        </p:txBody>
+      </p:sp>
+      <p:pic>
+        <p:nvPicPr>
+          <p:cNvPr id="5" name="Picture 4" descr="m3-screen.png"/>
+          <p:cNvPicPr>
+            <a:picLocks noChangeAspect="1"/>
+          </p:cNvPicPr>
+          <p:nvPr/>
+        </p:nvPicPr>
+        <p:blipFill>
+          <a:blip r:embed="rId2"/>
+          <a:stretch>
+            <a:fillRect/>
+          </a:stretch>
+        </p:blipFill>
+        <p:spPr>
+          <a:xfrm>
+            <a:off x="564837" y="1115568"/>
+            <a:ext cx="2345045" cy="5074920"/>
+          </a:xfrm>
+          <a:prstGeom prst="rect">
+            <a:avLst/>
+          </a:prstGeom>
+          <a:ln w="9525">
+            <a:solidFill>
+              <a:srgbClr val="D4E0EA"/>
+            </a:solidFill>
+          </a:ln>
+        </p:spPr>
+      </p:pic>
+      <p:sp>
+        <p:nvSpPr>
+          <p:cNvPr id="6" name="TextBox 5"/>
+          <p:cNvSpPr txBox="1"/>
+          <p:nvPr/>
+        </p:nvSpPr>
+        <p:spPr>
+          <a:xfrm>
+            <a:off x="594360" y="6236208"/>
+            <a:ext cx="2468880" cy="182880"/>
+          </a:xfrm>
+          <a:prstGeom prst="rect">
+            <a:avLst/>
+          </a:prstGeom>
+          <a:noFill/>
+        </p:spPr>
+        <p:txBody>
+          <a:bodyPr wrap="square" lIns="0" rIns="0" tIns="0" bIns="0" anchor="t">
+            <a:spAutoFit/>
+          </a:bodyPr>
+          <a:lstStyle/>
+          <a:p>
+            <a:pPr algn="l">
+              <a:lnSpc>
+                <a:spcPct val="100000"/>
+              </a:lnSpc>
+            </a:pPr>
+            <a:r>
+              <a:rPr sz="800" b="0">
+                <a:solidFill>
+                  <a:srgbClr val="7B8B9B"/>
+                </a:solidFill>
+                <a:latin typeface="微软雅黑"/>
+                <a:ea typeface="微软雅黑"/>
+              </a:rPr>
+              <a:t>手机端 · 对方打出一张牌</a:t>
+            </a:r>
+          </a:p>
+        </p:txBody>
+      </p:sp>
+      <p:sp>
+        <p:nvSpPr>
+          <p:cNvPr id="7" name="TextBox 6"/>
+          <p:cNvSpPr txBox="1"/>
+          <p:nvPr/>
+        </p:nvSpPr>
+        <p:spPr>
+          <a:xfrm>
+            <a:off x="3611880" y="1170432"/>
+            <a:ext cx="2377440" cy="228600"/>
+          </a:xfrm>
+          <a:prstGeom prst="rect">
+            <a:avLst/>
+          </a:prstGeom>
+          <a:noFill/>
+        </p:spPr>
+        <p:txBody>
+          <a:bodyPr wrap="square" lIns="0" rIns="0" tIns="0" bIns="0" anchor="t">
+            <a:spAutoFit/>
+          </a:bodyPr>
+          <a:lstStyle/>
+          <a:p>
+            <a:pPr algn="l">
+              <a:lnSpc>
+                <a:spcPct val="100000"/>
+              </a:lnSpc>
+            </a:pPr>
+            <a:r>
+              <a:rPr sz="900" b="1">
+                <a:solidFill>
+                  <a:srgbClr val="E9A23B"/>
+                </a:solidFill>
+                <a:latin typeface="微软雅黑"/>
+                <a:ea typeface="微软雅黑"/>
+              </a:rPr>
+              <a:t>本页不讲 · Q&amp;A 备用</a:t>
+            </a:r>
+          </a:p>
+        </p:txBody>
+      </p:sp>
+      <p:sp>
+        <p:nvSpPr>
+          <p:cNvPr id="8" name="TextBox 7"/>
+          <p:cNvSpPr txBox="1"/>
+          <p:nvPr/>
+        </p:nvSpPr>
+        <p:spPr>
+          <a:xfrm>
+            <a:off x="3611880" y="1600200"/>
+            <a:ext cx="8092440" cy="2560320"/>
+          </a:xfrm>
+          <a:prstGeom prst="rect">
+            <a:avLst/>
+          </a:prstGeom>
+          <a:noFill/>
+        </p:spPr>
+        <p:txBody>
+          <a:bodyPr wrap="square" lIns="0" rIns="0" tIns="0" bIns="0">
+            <a:spAutoFit/>
+          </a:bodyPr>
+          <a:lstStyle/>
+          <a:p>
+            <a:pPr>
+              <a:lnSpc>
+                <a:spcPct val="120000"/>
+              </a:lnSpc>
+              <a:spcAft>
+                <a:spcPts val="1000"/>
+              </a:spcAft>
+            </a:pPr>
+            <a:r>
+              <a:rPr sz="1400" b="1">
+                <a:solidFill>
+                  <a:srgbClr val="2A9D8F"/>
+                </a:solidFill>
+                <a:latin typeface="微软雅黑"/>
+                <a:ea typeface="微软雅黑"/>
+              </a:rPr>
+              <a:t>• </a:t>
+            </a:r>
+            <a:r>
+              <a:rPr sz="1400" b="0">
+                <a:solidFill>
+                  <a:srgbClr val="5B6B7C"/>
+                </a:solidFill>
+                <a:latin typeface="微软雅黑"/>
+                <a:ea typeface="微软雅黑"/>
+              </a:rPr>
+              <a:t>主入口是手机 PWA，不是桌面 exe：消息、截图、录音都在手机上。</a:t>
+            </a:r>
+          </a:p>
+          <a:p>
+            <a:pPr>
+              <a:lnSpc>
+                <a:spcPct val="120000"/>
+              </a:lnSpc>
+              <a:spcAft>
+                <a:spcPts val="1000"/>
+              </a:spcAft>
+            </a:pPr>
+            <a:r>
+              <a:rPr sz="1400" b="1">
+                <a:solidFill>
+                  <a:srgbClr val="2A9D8F"/>
+                </a:solidFill>
+                <a:latin typeface="微软雅黑"/>
+                <a:ea typeface="微软雅黑"/>
+              </a:rPr>
+              <a:t>• </a:t>
+            </a:r>
+            <a:r>
+              <a:rPr sz="1400" b="0">
+                <a:solidFill>
+                  <a:srgbClr val="5B6B7C"/>
+                </a:solidFill>
+                <a:latin typeface="微软雅黑"/>
+                <a:ea typeface="微软雅黑"/>
+              </a:rPr>
+              <a:t>对方只有一个牌背 + “数量未知”；声称是虚线标签，不是牌。</a:t>
+            </a:r>
+          </a:p>
+          <a:p>
+            <a:pPr>
+              <a:lnSpc>
+                <a:spcPct val="120000"/>
+              </a:lnSpc>
+              <a:spcAft>
+                <a:spcPts val="1000"/>
+              </a:spcAft>
+            </a:pPr>
+            <a:r>
+              <a:rPr sz="1400" b="1">
+                <a:solidFill>
+                  <a:srgbClr val="2A9D8F"/>
+                </a:solidFill>
+                <a:latin typeface="微软雅黑"/>
+                <a:ea typeface="微软雅黑"/>
+              </a:rPr>
+              <a:t>• </a:t>
+            </a:r>
+            <a:r>
+              <a:rPr sz="1400" b="0">
+                <a:solidFill>
+                  <a:srgbClr val="5B6B7C"/>
+                </a:solidFill>
+                <a:latin typeface="微软雅黑"/>
+                <a:ea typeface="微软雅黑"/>
+              </a:rPr>
+              <a:t>只有“已打出”的牌才进入核验；复盘才给实际手牌。</a:t>
+            </a:r>
+          </a:p>
+          <a:p>
+            <a:pPr>
+              <a:lnSpc>
+                <a:spcPct val="120000"/>
+              </a:lnSpc>
+              <a:spcAft>
+                <a:spcPts val="1000"/>
+              </a:spcAft>
+            </a:pPr>
+            <a:r>
+              <a:rPr sz="1400" b="1">
+                <a:solidFill>
+                  <a:srgbClr val="2A9D8F"/>
+                </a:solidFill>
+                <a:latin typeface="微软雅黑"/>
+                <a:ea typeface="微软雅黑"/>
+              </a:rPr>
+              <a:t>• </a:t>
+            </a:r>
+            <a:r>
+              <a:rPr sz="1400" b="0">
+                <a:solidFill>
+                  <a:srgbClr val="5B6B7C"/>
+                </a:solidFill>
+                <a:latin typeface="微软雅黑"/>
+                <a:ea typeface="微软雅黑"/>
+              </a:rPr>
+              <a:t>桌面只做深读、整理、导出；手机负责“发生的那一刻”。</a:t>
+            </a:r>
+          </a:p>
+        </p:txBody>
+      </p:sp>
+      <p:sp>
+        <p:nvSpPr>
+          <p:cNvPr id="9" name="Rounded Rectangle 8"/>
+          <p:cNvSpPr/>
+          <p:nvPr/>
+        </p:nvSpPr>
+        <p:spPr>
+          <a:xfrm>
+            <a:off x="3611880" y="4343400"/>
+            <a:ext cx="8046720" cy="1051560"/>
+          </a:xfrm>
+          <a:prstGeom prst="roundRect">
+            <a:avLst>
+              <a:gd name="adj" fmla="val 8000"/>
+            </a:avLst>
+          </a:prstGeom>
+          <a:solidFill>
+            <a:srgbClr val="FFF6E6"/>
+          </a:solidFill>
+          <a:ln w="12700">
+            <a:solidFill>
+              <a:srgbClr val="F0D29A"/>
+            </a:solidFill>
+          </a:ln>
+          <a:effectLst/>
+        </p:spPr>
+        <p:style>
+          <a:lnRef idx="1">
+            <a:schemeClr val="accent1"/>
+          </a:lnRef>
+          <a:fillRef idx="3">
+            <a:schemeClr val="accent1"/>
+          </a:fillRef>
+          <a:effectRef idx="2">
+            <a:schemeClr val="accent1"/>
+          </a:effectRef>
+          <a:fontRef idx="minor">
+            <a:schemeClr val="lt1"/>
+          </a:fontRef>
+        </p:style>
+        <p:txBody>
+          <a:bodyPr rtlCol="0" anchor="ctr"/>
+          <a:lstStyle/>
+          <a:p>
+            <a:pPr algn="ctr"/>
+          </a:p>
+        </p:txBody>
+      </p:sp>
+      <p:sp>
+        <p:nvSpPr>
+          <p:cNvPr id="10" name="TextBox 9"/>
+          <p:cNvSpPr txBox="1"/>
+          <p:nvPr/>
+        </p:nvSpPr>
+        <p:spPr>
+          <a:xfrm>
+            <a:off x="3794760" y="4526280"/>
+            <a:ext cx="7635240" cy="365760"/>
+          </a:xfrm>
+          <a:prstGeom prst="rect">
+            <a:avLst/>
+          </a:prstGeom>
+          <a:noFill/>
+        </p:spPr>
+        <p:txBody>
+          <a:bodyPr wrap="square" lIns="0" rIns="0" tIns="0" bIns="0" anchor="t">
+            <a:spAutoFit/>
+          </a:bodyPr>
+          <a:lstStyle/>
+          <a:p>
+            <a:pPr algn="l">
+              <a:lnSpc>
+                <a:spcPct val="100000"/>
+              </a:lnSpc>
+            </a:pPr>
+            <a:r>
+              <a:rPr sz="1600" b="1">
+                <a:solidFill>
+                  <a:srgbClr val="7A4A12"/>
+                </a:solidFill>
+                <a:latin typeface="微软雅黑"/>
+                <a:ea typeface="微软雅黑"/>
+              </a:rPr>
+              <a:t>“他用了哪一张，哪一张才显示；否则用户就成上帝了。”</a:t>
+            </a:r>
+          </a:p>
+        </p:txBody>
+      </p:sp>
+      <p:sp>
+        <p:nvSpPr>
+          <p:cNvPr id="11" name="TextBox 10"/>
+          <p:cNvSpPr txBox="1"/>
+          <p:nvPr/>
+        </p:nvSpPr>
+        <p:spPr>
+          <a:xfrm>
+            <a:off x="3611880" y="5715000"/>
+            <a:ext cx="8046720" cy="274320"/>
+          </a:xfrm>
+          <a:prstGeom prst="rect">
+            <a:avLst/>
+          </a:prstGeom>
+          <a:noFill/>
+        </p:spPr>
+        <p:txBody>
+          <a:bodyPr wrap="square" lIns="0" rIns="0" tIns="0" bIns="0" anchor="t">
+            <a:spAutoFit/>
+          </a:bodyPr>
+          <a:lstStyle/>
+          <a:p>
+            <a:pPr algn="l">
+              <a:lnSpc>
+                <a:spcPct val="100000"/>
+              </a:lnSpc>
+            </a:pPr>
+            <a:r>
+              <a:rPr sz="1100" b="0">
+                <a:solidFill>
+                  <a:srgbClr val="2A9D8F"/>
+                </a:solidFill>
+                <a:latin typeface="微软雅黑"/>
+                <a:ea typeface="微软雅黑"/>
+              </a:rPr>
+              <a:t>产品原则：声称 ≠ 手牌；手牌 ≠ 已打出；已打出 ≠ 真实；真实 ≠ 能证明。</a:t>
+            </a:r>
+          </a:p>
+        </p:txBody>
+      </p:sp>
+      <p:sp>
+        <p:nvSpPr>
+          <p:cNvPr id="12" name="Rectangle 11"/>
+          <p:cNvSpPr/>
+          <p:nvPr/>
+        </p:nvSpPr>
+        <p:spPr>
+          <a:xfrm>
+            <a:off x="548640" y="6455664"/>
+            <a:ext cx="11091672" cy="7315"/>
+          </a:xfrm>
+          <a:prstGeom prst="rect">
+            <a:avLst/>
+          </a:prstGeom>
+          <a:solidFill>
+            <a:srgbClr val="D4E0EA"/>
+          </a:solidFill>
+          <a:ln>
+            <a:noFill/>
+          </a:ln>
+          <a:effectLst/>
+        </p:spPr>
+        <p:style>
+          <a:lnRef idx="1">
+            <a:schemeClr val="accent1"/>
+          </a:lnRef>
+          <a:fillRef idx="3">
+            <a:schemeClr val="accent1"/>
+          </a:fillRef>
+          <a:effectRef idx="2">
+            <a:schemeClr val="accent1"/>
+          </a:effectRef>
+          <a:fontRef idx="minor">
+            <a:schemeClr val="lt1"/>
+          </a:fontRef>
+        </p:style>
+        <p:txBody>
+          <a:bodyPr rtlCol="0" anchor="ctr"/>
+          <a:lstStyle/>
+          <a:p>
+            <a:pPr algn="ctr"/>
+          </a:p>
+        </p:txBody>
+      </p:sp>
+      <p:sp>
+        <p:nvSpPr>
+          <p:cNvPr id="13" name="TextBox 12"/>
+          <p:cNvSpPr txBox="1"/>
+          <p:nvPr/>
+        </p:nvSpPr>
+        <p:spPr>
+          <a:xfrm>
+            <a:off x="548640" y="6510528"/>
+            <a:ext cx="5486400" cy="201168"/>
+          </a:xfrm>
+          <a:prstGeom prst="rect">
+            <a:avLst/>
+          </a:prstGeom>
+          <a:noFill/>
+        </p:spPr>
+        <p:txBody>
+          <a:bodyPr wrap="square" lIns="0" rIns="0" tIns="0" bIns="0" anchor="t">
+            <a:spAutoFit/>
+          </a:bodyPr>
+          <a:lstStyle/>
+          <a:p>
+            <a:pPr algn="l">
+              <a:lnSpc>
+                <a:spcPct val="100000"/>
+              </a:lnSpc>
+            </a:pPr>
+            <a:r>
+              <a:rPr sz="800" b="0">
+                <a:solidFill>
+                  <a:srgbClr val="7B8B9B"/>
+                </a:solidFill>
+                <a:latin typeface="微软雅黑"/>
+                <a:ea typeface="微软雅黑"/>
+              </a:rPr>
+              <a:t>法前哨 · 技术方案 v1.0</a:t>
+            </a:r>
+          </a:p>
+        </p:txBody>
+      </p:sp>
+      <p:sp>
+        <p:nvSpPr>
+          <p:cNvPr id="14" name="TextBox 13"/>
+          <p:cNvSpPr txBox="1"/>
+          <p:nvPr/>
+        </p:nvSpPr>
+        <p:spPr>
+          <a:xfrm>
+            <a:off x="10378440" y="6510528"/>
+            <a:ext cx="1234440" cy="201168"/>
+          </a:xfrm>
+          <a:prstGeom prst="rect">
+            <a:avLst/>
+          </a:prstGeom>
+          <a:noFill/>
+        </p:spPr>
+        <p:txBody>
+          <a:bodyPr wrap="square" lIns="0" rIns="0" tIns="0" bIns="0" anchor="t">
+            <a:spAutoFit/>
+          </a:bodyPr>
+          <a:lstStyle/>
+          <a:p>
+            <a:pPr algn="r">
+              <a:lnSpc>
+                <a:spcPct val="100000"/>
+              </a:lnSpc>
+            </a:pPr>
+            <a:r>
+              <a:rPr sz="800" b="0">
+                <a:solidFill>
+                  <a:srgbClr val="7B8B9B"/>
+                </a:solidFill>
+                <a:latin typeface="微软雅黑"/>
+                <a:ea typeface="微软雅黑"/>
+              </a:rPr>
+              <a:t>15 / 16</a:t>
+            </a:r>
+          </a:p>
+        </p:txBody>
+      </p:sp>
+    </p:spTree>
+  </p:cSld>
+  <p:clrMapOvr>
+    <a:masterClrMapping/>
+  </p:clrMapOvr>
+</p:sld>
+</file>
+
+<file path=ppt/slides/slide16.xml><?xml version="1.0" encoding="utf-8"?>
+<p:sld xmlns:a="http://schemas.openxmlformats.org/drawingml/2006/main" xmlns:p="http://schemas.openxmlformats.org/presentationml/2006/main" xmlns:r="http://schemas.openxmlformats.org/officeDocument/2006/relationships">
+  <p:cSld>
+    <p:bg>
+      <p:bgPr>
+        <a:solidFill>
+          <a:srgbClr val="F7F9FC"/>
+        </a:solidFill>
+        <a:effectLst/>
+      </p:bgPr>
+    </p:bg>
+    <p:spTree>
+      <p:nvGrpSpPr>
+        <p:cNvPr id="1" name=""/>
+        <p:cNvGrpSpPr/>
+        <p:nvPr/>
+      </p:nvGrpSpPr>
+      <p:grpSpPr/>
+      <p:sp>
+        <p:nvSpPr>
           <p:cNvPr id="2" name="Rectangle 1"/>
           <p:cNvSpPr/>
           <p:nvPr/>
@@ -12986,7 +13711,7 @@
                 <a:latin typeface="微软雅黑"/>
                 <a:ea typeface="微软雅黑"/>
               </a:rPr>
-              <a:t>02 / 15</a:t>
+              <a:t>02 / 16</a:t>
             </a:r>
           </a:p>
         </p:txBody>
@@ -14020,7 +14745,7 @@
                 <a:latin typeface="微软雅黑"/>
                 <a:ea typeface="微软雅黑"/>
               </a:rPr>
-              <a:t>03 / 15</a:t>
+              <a:t>03 / 16</a:t>
             </a:r>
           </a:p>
         </p:txBody>
@@ -15564,7 +16289,7 @@
                 <a:latin typeface="微软雅黑"/>
                 <a:ea typeface="微软雅黑"/>
               </a:rPr>
-              <a:t>04 / 15</a:t>
+              <a:t>04 / 16</a:t>
             </a:r>
           </a:p>
         </p:txBody>
@@ -16153,7 +16878,7 @@
                 <a:latin typeface="微软雅黑"/>
                 <a:ea typeface="微软雅黑"/>
               </a:rPr>
-              <a:t>05 / 15</a:t>
+              <a:t>05 / 16</a:t>
             </a:r>
           </a:p>
         </p:txBody>
@@ -18587,7 +19312,7 @@
                 <a:latin typeface="微软雅黑"/>
                 <a:ea typeface="微软雅黑"/>
               </a:rPr>
-              <a:t>06 / 15</a:t>
+              <a:t>06 / 16</a:t>
             </a:r>
           </a:p>
         </p:txBody>
@@ -19886,7 +20611,7 @@
                 <a:latin typeface="微软雅黑"/>
                 <a:ea typeface="微软雅黑"/>
               </a:rPr>
-              <a:t>07 / 15</a:t>
+              <a:t>07 / 16</a:t>
             </a:r>
           </a:p>
         </p:txBody>
@@ -21101,7 +21826,7 @@
                 <a:latin typeface="微软雅黑"/>
                 <a:ea typeface="微软雅黑"/>
               </a:rPr>
-              <a:t>08 / 15</a:t>
+              <a:t>08 / 16</a:t>
             </a:r>
           </a:p>
         </p:txBody>
@@ -22758,7 +23483,7 @@
                 <a:latin typeface="微软雅黑"/>
                 <a:ea typeface="微软雅黑"/>
               </a:rPr>
-              <a:t>09 / 15</a:t>
+              <a:t>09 / 16</a:t>
             </a:r>
           </a:p>
         </p:txBody>

--- a/docs/aicomp/法前哨-答辩PPT.pptx
+++ b/docs/aicomp/法前哨-答辩PPT.pptx
@@ -727,7 +727,7 @@
           <a:lstStyle/>
           <a:p>
             <a:r>
-              <a:t>这条是真实外部 AIC 打进来的，不是我们自己刷的。结论恰好展示了产品价值：证据不足时敢说无法判定，并把举证责任讲清楚。</a:t>
+              <a:t>这两条都是真实外部 AIC 打进来的，不是我们自己刷的；两次来自同一外部 AIC。结论恰好展示了产品价值：证据不足时敢说无法判定，并把举证责任讲清楚。</a:t>
             </a:r>
           </a:p>
         </p:txBody>
@@ -797,7 +797,7 @@
           <a:lstStyle/>
           <a:p>
             <a:r>
-              <a:t>数字只报有证据的：12/10/2 角色、20 轮、12/12 指纹、1 次外部成功。95.45% 必须说明是同源基准，不是泛化准确率。</a:t>
+              <a:t>数字只报有证据的：12/10/2 角色、23 轮、12/12 指纹、2 次外部成功（同 1 个外部 AIC）。95.45% 必须说明是同源基准，不是泛化准确率。</a:t>
             </a:r>
           </a:p>
         </p:txBody>
@@ -7812,7 +7812,7 @@
                 <a:latin typeface="微软雅黑"/>
                 <a:ea typeface="微软雅黑"/>
               </a:rPr>
-              <a:t>改名后外部成功 1 次；历史 268 inbound / 成功 1</a:t>
+              <a:t>改名后外部成功 2 次（同 1 个 AIC）；历史 268 inbound / 成功 1</a:t>
             </a:r>
           </a:p>
         </p:txBody>
@@ -8279,7 +8279,7 @@
                 <a:latin typeface="微软雅黑"/>
                 <a:ea typeface="微软雅黑"/>
               </a:rPr>
-              <a:t>真实外部调用：不是自测，是另一个账号打进来的</a:t>
+              <a:t>真实外部调用：不是自测，是外部账号打进来的</a:t>
             </a:r>
           </a:p>
         </p:txBody>
@@ -8515,7 +8515,7 @@
                 <a:latin typeface="微软雅黑"/>
                 <a:ea typeface="微软雅黑"/>
               </a:rPr>
-              <a:t>任务 task_96fd0329ecbb，completed，14:12。</a:t>
+              <a:t>task_96fd0329ecbb（10-21）+ task_917b67602160（10-23），均 completed。</a:t>
             </a:r>
           </a:p>
           <a:p>
@@ -8545,7 +8545,7 @@
                 <a:latin typeface="微软雅黑"/>
                 <a:ea typeface="微软雅黑"/>
               </a:rPr>
-              <a:t>结论：无法判定 + 谁主张谁举证 + 名誉权方向。</a:t>
+              <a:t>结论：无法判定 + 谁主张谁举证；两次来自同一外部 AIC。</a:t>
             </a:r>
           </a:p>
           <a:p>
@@ -8575,7 +8575,7 @@
                 <a:latin typeface="微软雅黑"/>
                 <a:ea typeface="微软雅黑"/>
               </a:rPr>
-              <a:t>同会话另有 1 条 canceled；6 条内部自测不计外部。</a:t>
+              <a:t>另有 2 条 canceled（含一次空正文重试）；6 条内部自测不计外部。</a:t>
             </a:r>
           </a:p>
         </p:txBody>
@@ -9231,7 +9231,7 @@
                 <a:latin typeface="微软雅黑"/>
                 <a:ea typeface="微软雅黑"/>
               </a:rPr>
-              <a:t>20 轮</a:t>
+              <a:t>23 轮</a:t>
             </a:r>
           </a:p>
         </p:txBody>
@@ -9271,7 +9271,7 @@
                 <a:latin typeface="微软雅黑"/>
                 <a:ea typeface="微软雅黑"/>
               </a:rPr>
-              <a:t>真实案例轮 / 跑满 1 圈</a:t>
+              <a:t>真实案例轮</a:t>
             </a:r>
           </a:p>
         </p:txBody>
@@ -9311,7 +9311,7 @@
                 <a:latin typeface="微软雅黑"/>
                 <a:ea typeface="微软雅黑"/>
               </a:rPr>
-              <a:t>最近一轮四检全绿</a:t>
+              <a:t>最新 10-23 四检全绿</a:t>
             </a:r>
           </a:p>
         </p:txBody>
@@ -9567,7 +9567,7 @@
                 <a:latin typeface="微软雅黑"/>
                 <a:ea typeface="微软雅黑"/>
               </a:rPr>
-              <a:t>1 次</a:t>
+              <a:t>2 次</a:t>
             </a:r>
           </a:p>
         </p:txBody>
@@ -9647,7 +9647,7 @@
                 <a:latin typeface="微软雅黑"/>
                 <a:ea typeface="微软雅黑"/>
               </a:rPr>
-              <a:t>task_96fd0329ecbb</a:t>
+              <a:t>同 1 个外部 AIC</a:t>
             </a:r>
           </a:p>
         </p:txBody>
@@ -9787,33 +9787,33 @@
         <p:spPr>
           <a:xfrm>
             <a:off x="749808" y="4069080"/>
-            <a:ext cx="4754880" cy="228600"/>
-          </a:xfrm>
-          <a:prstGeom prst="rect">
-            <a:avLst/>
-          </a:prstGeom>
-          <a:noFill/>
-        </p:spPr>
-        <p:txBody>
-          <a:bodyPr wrap="square" lIns="0" rIns="0" tIns="0" bIns="0" anchor="t">
-            <a:spAutoFit/>
-          </a:bodyPr>
-          <a:lstStyle/>
-          <a:p>
-            <a:pPr algn="l">
-              <a:lnSpc>
-                <a:spcPct val="100000"/>
-              </a:lnSpc>
-            </a:pPr>
-            <a:r>
-              <a:rPr sz="900" b="0">
+            <a:ext cx="4937760" cy="228600"/>
+          </a:xfrm>
+          <a:prstGeom prst="rect">
+            <a:avLst/>
+          </a:prstGeom>
+          <a:noFill/>
+        </p:spPr>
+        <p:txBody>
+          <a:bodyPr wrap="square" lIns="0" rIns="0" tIns="0" bIns="0" anchor="t">
+            <a:spAutoFit/>
+          </a:bodyPr>
+          <a:lstStyle/>
+          <a:p>
+            <a:pPr algn="l">
+              <a:lnSpc>
+                <a:spcPct val="100000"/>
+              </a:lnSpc>
+            </a:pPr>
+            <a:r>
+              <a:rPr sz="850" b="0">
                 <a:solidFill>
                   <a:srgbClr val="5B6B7C"/>
                 </a:solidFill>
                 <a:latin typeface="微软雅黑"/>
                 <a:ea typeface="微软雅黑"/>
               </a:rPr>
-              <a:t>不和新 AIC 的 1 次相加；分开写。</a:t>
+              <a:t>不和新 AIC 的 2 次相加；两次成功仍是同一外部 AIC。</a:t>
             </a:r>
           </a:p>
         </p:txBody>
